--- a/Fase4/03_results/FaseB/TablaResultadosFase4B.pptx
+++ b/Fase4/03_results/FaseB/TablaResultadosFase4B.pptx
@@ -107,6 +107,11 @@
       </a:defRPr>
     </a:lvl9pPr>
   </p:defaultTextStyle>
+  <p:extLst>
+    <p:ext uri="{EFAFB233-063F-42B5-8137-9DF3F51BA10A}">
+      <p15:sldGuideLst xmlns:p15="http://schemas.microsoft.com/office/powerpoint/2012/main"/>
+    </p:ext>
+  </p:extLst>
 </p:presentation>
 </file>
 
@@ -192,7 +197,7 @@
           <a:p>
             <a:fld id="{F79B5C64-F930-5446-A4AF-8B2DE0E802EC}" type="datetimeFigureOut">
               <a:rPr lang="es-ES_tradnl" smtClean="0"/>
-              <a:t>7/4/26</a:t>
+              <a:t>12/4/26</a:t>
             </a:fld>
             <a:endParaRPr lang="es-ES_tradnl"/>
           </a:p>
@@ -729,7 +734,7 @@
           <a:p>
             <a:fld id="{4766A129-9599-914B-8740-D1C1CCBCA724}" type="datetimeFigureOut">
               <a:rPr lang="es-ES_tradnl" smtClean="0"/>
-              <a:t>7/4/26</a:t>
+              <a:t>12/4/26</a:t>
             </a:fld>
             <a:endParaRPr lang="es-ES_tradnl"/>
           </a:p>
@@ -929,7 +934,7 @@
           <a:p>
             <a:fld id="{4766A129-9599-914B-8740-D1C1CCBCA724}" type="datetimeFigureOut">
               <a:rPr lang="es-ES_tradnl" smtClean="0"/>
-              <a:t>7/4/26</a:t>
+              <a:t>12/4/26</a:t>
             </a:fld>
             <a:endParaRPr lang="es-ES_tradnl"/>
           </a:p>
@@ -1139,7 +1144,7 @@
           <a:p>
             <a:fld id="{4766A129-9599-914B-8740-D1C1CCBCA724}" type="datetimeFigureOut">
               <a:rPr lang="es-ES_tradnl" smtClean="0"/>
-              <a:t>7/4/26</a:t>
+              <a:t>12/4/26</a:t>
             </a:fld>
             <a:endParaRPr lang="es-ES_tradnl"/>
           </a:p>
@@ -1339,7 +1344,7 @@
           <a:p>
             <a:fld id="{4766A129-9599-914B-8740-D1C1CCBCA724}" type="datetimeFigureOut">
               <a:rPr lang="es-ES_tradnl" smtClean="0"/>
-              <a:t>7/4/26</a:t>
+              <a:t>12/4/26</a:t>
             </a:fld>
             <a:endParaRPr lang="es-ES_tradnl"/>
           </a:p>
@@ -1615,7 +1620,7 @@
           <a:p>
             <a:fld id="{4766A129-9599-914B-8740-D1C1CCBCA724}" type="datetimeFigureOut">
               <a:rPr lang="es-ES_tradnl" smtClean="0"/>
-              <a:t>7/4/26</a:t>
+              <a:t>12/4/26</a:t>
             </a:fld>
             <a:endParaRPr lang="es-ES_tradnl"/>
           </a:p>
@@ -1883,7 +1888,7 @@
           <a:p>
             <a:fld id="{4766A129-9599-914B-8740-D1C1CCBCA724}" type="datetimeFigureOut">
               <a:rPr lang="es-ES_tradnl" smtClean="0"/>
-              <a:t>7/4/26</a:t>
+              <a:t>12/4/26</a:t>
             </a:fld>
             <a:endParaRPr lang="es-ES_tradnl"/>
           </a:p>
@@ -2298,7 +2303,7 @@
           <a:p>
             <a:fld id="{4766A129-9599-914B-8740-D1C1CCBCA724}" type="datetimeFigureOut">
               <a:rPr lang="es-ES_tradnl" smtClean="0"/>
-              <a:t>7/4/26</a:t>
+              <a:t>12/4/26</a:t>
             </a:fld>
             <a:endParaRPr lang="es-ES_tradnl"/>
           </a:p>
@@ -2440,7 +2445,7 @@
           <a:p>
             <a:fld id="{4766A129-9599-914B-8740-D1C1CCBCA724}" type="datetimeFigureOut">
               <a:rPr lang="es-ES_tradnl" smtClean="0"/>
-              <a:t>7/4/26</a:t>
+              <a:t>12/4/26</a:t>
             </a:fld>
             <a:endParaRPr lang="es-ES_tradnl"/>
           </a:p>
@@ -2553,7 +2558,7 @@
           <a:p>
             <a:fld id="{4766A129-9599-914B-8740-D1C1CCBCA724}" type="datetimeFigureOut">
               <a:rPr lang="es-ES_tradnl" smtClean="0"/>
-              <a:t>7/4/26</a:t>
+              <a:t>12/4/26</a:t>
             </a:fld>
             <a:endParaRPr lang="es-ES_tradnl"/>
           </a:p>
@@ -2866,7 +2871,7 @@
           <a:p>
             <a:fld id="{4766A129-9599-914B-8740-D1C1CCBCA724}" type="datetimeFigureOut">
               <a:rPr lang="es-ES_tradnl" smtClean="0"/>
-              <a:t>7/4/26</a:t>
+              <a:t>12/4/26</a:t>
             </a:fld>
             <a:endParaRPr lang="es-ES_tradnl"/>
           </a:p>
@@ -3155,7 +3160,7 @@
           <a:p>
             <a:fld id="{4766A129-9599-914B-8740-D1C1CCBCA724}" type="datetimeFigureOut">
               <a:rPr lang="es-ES_tradnl" smtClean="0"/>
-              <a:t>7/4/26</a:t>
+              <a:t>12/4/26</a:t>
             </a:fld>
             <a:endParaRPr lang="es-ES_tradnl"/>
           </a:p>
@@ -3398,7 +3403,7 @@
           <a:p>
             <a:fld id="{4766A129-9599-914B-8740-D1C1CCBCA724}" type="datetimeFigureOut">
               <a:rPr lang="es-ES_tradnl" smtClean="0"/>
-              <a:t>7/4/26</a:t>
+              <a:t>12/4/26</a:t>
             </a:fld>
             <a:endParaRPr lang="es-ES_tradnl"/>
           </a:p>
@@ -3954,7 +3959,13 @@
           <p:cNvGraphicFramePr>
             <a:graphicFrameLocks noGrp="1"/>
           </p:cNvGraphicFramePr>
-          <p:nvPr/>
+          <p:nvPr>
+            <p:extLst>
+              <p:ext uri="{D42A27DB-BD31-4B8C-83A1-F6EECF244321}">
+                <p14:modId xmlns:p14="http://schemas.microsoft.com/office/powerpoint/2010/main" val="3176839800"/>
+              </p:ext>
+            </p:extLst>
+          </p:nvPr>
         </p:nvGraphicFramePr>
         <p:xfrm>
           <a:off x="383894" y="1428173"/>
@@ -4888,13 +4899,16 @@
                       <a:pPr algn="ctr">
                         <a:buNone/>
                       </a:pPr>
-                      <a:endParaRPr lang="es-ES_tradnl" sz="1200" noProof="1">
-                        <a:solidFill>
-                          <a:schemeClr val="tx1"/>
-                        </a:solidFill>
-                        <a:latin typeface="Times New Roman" panose="02020603050405020304" pitchFamily="18" charset="0"/>
-                        <a:cs typeface="Times New Roman" panose="02020603050405020304" pitchFamily="18" charset="0"/>
-                      </a:endParaRPr>
+                      <a:r>
+                        <a:rPr lang="es-ES_tradnl" sz="1200" noProof="1">
+                          <a:solidFill>
+                            <a:schemeClr val="tx1"/>
+                          </a:solidFill>
+                          <a:latin typeface="Times New Roman" panose="02020603050405020304" pitchFamily="18" charset="0"/>
+                          <a:cs typeface="Times New Roman" panose="02020603050405020304" pitchFamily="18" charset="0"/>
+                        </a:rPr>
+                        <a:t>36.25</a:t>
+                      </a:r>
                     </a:p>
                   </a:txBody>
                   <a:tcPr anchor="ctr">
@@ -5009,13 +5023,16 @@
                       <a:pPr algn="ctr">
                         <a:buNone/>
                       </a:pPr>
-                      <a:endParaRPr lang="es-ES_tradnl" sz="1200" noProof="1">
-                        <a:solidFill>
-                          <a:schemeClr val="tx1"/>
-                        </a:solidFill>
-                        <a:latin typeface="Times New Roman" panose="02020603050405020304" pitchFamily="18" charset="0"/>
-                        <a:cs typeface="Times New Roman" panose="02020603050405020304" pitchFamily="18" charset="0"/>
-                      </a:endParaRPr>
+                      <a:r>
+                        <a:rPr lang="es-ES_tradnl" sz="1200" noProof="1">
+                          <a:solidFill>
+                            <a:schemeClr val="tx1"/>
+                          </a:solidFill>
+                          <a:latin typeface="Times New Roman" panose="02020603050405020304" pitchFamily="18" charset="0"/>
+                          <a:cs typeface="Times New Roman" panose="02020603050405020304" pitchFamily="18" charset="0"/>
+                        </a:rPr>
+                        <a:t>46.33</a:t>
+                      </a:r>
                     </a:p>
                   </a:txBody>
                   <a:tcPr anchor="ctr">
@@ -5195,13 +5212,16 @@
                       <a:pPr algn="ctr">
                         <a:buNone/>
                       </a:pPr>
-                      <a:endParaRPr lang="es-ES_tradnl" sz="1200" noProof="1">
-                        <a:solidFill>
-                          <a:schemeClr val="tx1"/>
-                        </a:solidFill>
-                        <a:latin typeface="Times New Roman" panose="02020603050405020304" pitchFamily="18" charset="0"/>
-                        <a:cs typeface="Times New Roman" panose="02020603050405020304" pitchFamily="18" charset="0"/>
-                      </a:endParaRPr>
+                      <a:r>
+                        <a:rPr lang="es-ES_tradnl" sz="1200" noProof="1">
+                          <a:solidFill>
+                            <a:schemeClr val="tx1"/>
+                          </a:solidFill>
+                          <a:latin typeface="Times New Roman" panose="02020603050405020304" pitchFamily="18" charset="0"/>
+                          <a:cs typeface="Times New Roman" panose="02020603050405020304" pitchFamily="18" charset="0"/>
+                        </a:rPr>
+                        <a:t>36.60</a:t>
+                      </a:r>
                     </a:p>
                   </a:txBody>
                   <a:tcPr anchor="ctr">
@@ -5312,13 +5332,16 @@
                       <a:pPr algn="ctr">
                         <a:buNone/>
                       </a:pPr>
-                      <a:endParaRPr lang="es-ES_tradnl" sz="1200" noProof="1">
-                        <a:solidFill>
-                          <a:schemeClr val="tx1"/>
-                        </a:solidFill>
-                        <a:latin typeface="Times New Roman" panose="02020603050405020304" pitchFamily="18" charset="0"/>
-                        <a:cs typeface="Times New Roman" panose="02020603050405020304" pitchFamily="18" charset="0"/>
-                      </a:endParaRPr>
+                      <a:r>
+                        <a:rPr lang="es-ES_tradnl" sz="1200" noProof="1">
+                          <a:solidFill>
+                            <a:schemeClr val="tx1"/>
+                          </a:solidFill>
+                          <a:latin typeface="Times New Roman" panose="02020603050405020304" pitchFamily="18" charset="0"/>
+                          <a:cs typeface="Times New Roman" panose="02020603050405020304" pitchFamily="18" charset="0"/>
+                        </a:rPr>
+                        <a:t>46.37</a:t>
+                      </a:r>
                     </a:p>
                   </a:txBody>
                   <a:tcPr anchor="ctr">
@@ -5514,13 +5537,16 @@
                       <a:pPr algn="ctr">
                         <a:buNone/>
                       </a:pPr>
-                      <a:endParaRPr lang="es-ES_tradnl" sz="1200" noProof="1">
-                        <a:solidFill>
-                          <a:schemeClr val="tx1"/>
-                        </a:solidFill>
-                        <a:latin typeface="Times New Roman" panose="02020603050405020304" pitchFamily="18" charset="0"/>
-                        <a:cs typeface="Times New Roman" panose="02020603050405020304" pitchFamily="18" charset="0"/>
-                      </a:endParaRPr>
+                      <a:r>
+                        <a:rPr lang="es-ES_tradnl" sz="1200" noProof="1">
+                          <a:solidFill>
+                            <a:schemeClr val="tx1"/>
+                          </a:solidFill>
+                          <a:latin typeface="Times New Roman" panose="02020603050405020304" pitchFamily="18" charset="0"/>
+                          <a:cs typeface="Times New Roman" panose="02020603050405020304" pitchFamily="18" charset="0"/>
+                        </a:rPr>
+                        <a:t>36.53</a:t>
+                      </a:r>
                     </a:p>
                   </a:txBody>
                   <a:tcPr anchor="ctr">
@@ -5635,13 +5661,16 @@
                       <a:pPr algn="ctr">
                         <a:buNone/>
                       </a:pPr>
-                      <a:endParaRPr lang="es-ES_tradnl" sz="1200" noProof="1">
-                        <a:solidFill>
-                          <a:schemeClr val="tx1"/>
-                        </a:solidFill>
-                        <a:latin typeface="Times New Roman" panose="02020603050405020304" pitchFamily="18" charset="0"/>
-                        <a:cs typeface="Times New Roman" panose="02020603050405020304" pitchFamily="18" charset="0"/>
-                      </a:endParaRPr>
+                      <a:r>
+                        <a:rPr lang="es-ES_tradnl" sz="1200" noProof="1">
+                          <a:solidFill>
+                            <a:schemeClr val="tx1"/>
+                          </a:solidFill>
+                          <a:latin typeface="Times New Roman" panose="02020603050405020304" pitchFamily="18" charset="0"/>
+                          <a:cs typeface="Times New Roman" panose="02020603050405020304" pitchFamily="18" charset="0"/>
+                        </a:rPr>
+                        <a:t>46.64</a:t>
+                      </a:r>
                     </a:p>
                   </a:txBody>
                   <a:tcPr anchor="ctr">
@@ -5825,13 +5854,16 @@
                       <a:pPr algn="ctr">
                         <a:buNone/>
                       </a:pPr>
-                      <a:endParaRPr lang="es-ES_tradnl" sz="1200" noProof="1">
-                        <a:solidFill>
-                          <a:schemeClr val="tx1"/>
-                        </a:solidFill>
-                        <a:latin typeface="Times New Roman" panose="02020603050405020304" pitchFamily="18" charset="0"/>
-                        <a:cs typeface="Times New Roman" panose="02020603050405020304" pitchFamily="18" charset="0"/>
-                      </a:endParaRPr>
+                      <a:r>
+                        <a:rPr lang="es-ES_tradnl" sz="1200" noProof="1">
+                          <a:solidFill>
+                            <a:schemeClr val="tx1"/>
+                          </a:solidFill>
+                          <a:latin typeface="Times New Roman" panose="02020603050405020304" pitchFamily="18" charset="0"/>
+                          <a:cs typeface="Times New Roman" panose="02020603050405020304" pitchFamily="18" charset="0"/>
+                        </a:rPr>
+                        <a:t>42.59</a:t>
+                      </a:r>
                     </a:p>
                   </a:txBody>
                   <a:tcPr anchor="ctr">
@@ -5946,13 +5978,16 @@
                       <a:pPr algn="ctr">
                         <a:buNone/>
                       </a:pPr>
-                      <a:endParaRPr lang="es-ES_tradnl" sz="1200" noProof="1">
-                        <a:solidFill>
-                          <a:schemeClr val="tx1"/>
-                        </a:solidFill>
-                        <a:latin typeface="Times New Roman" panose="02020603050405020304" pitchFamily="18" charset="0"/>
-                        <a:cs typeface="Times New Roman" panose="02020603050405020304" pitchFamily="18" charset="0"/>
-                      </a:endParaRPr>
+                      <a:r>
+                        <a:rPr lang="es-ES_tradnl" sz="1200" noProof="1">
+                          <a:solidFill>
+                            <a:schemeClr val="tx1"/>
+                          </a:solidFill>
+                          <a:latin typeface="Times New Roman" panose="02020603050405020304" pitchFamily="18" charset="0"/>
+                          <a:cs typeface="Times New Roman" panose="02020603050405020304" pitchFamily="18" charset="0"/>
+                        </a:rPr>
+                        <a:t>45.79</a:t>
+                      </a:r>
                     </a:p>
                   </a:txBody>
                   <a:tcPr anchor="ctr">
@@ -6146,13 +6181,16 @@
                       <a:pPr algn="ctr">
                         <a:buNone/>
                       </a:pPr>
-                      <a:endParaRPr lang="es-ES_tradnl" sz="1200" noProof="1">
-                        <a:solidFill>
-                          <a:schemeClr val="tx1"/>
-                        </a:solidFill>
-                        <a:latin typeface="Times New Roman" panose="02020603050405020304" pitchFamily="18" charset="0"/>
-                        <a:cs typeface="Times New Roman" panose="02020603050405020304" pitchFamily="18" charset="0"/>
-                      </a:endParaRPr>
+                      <a:r>
+                        <a:rPr lang="es-ES_tradnl" sz="1200" noProof="1">
+                          <a:solidFill>
+                            <a:schemeClr val="tx1"/>
+                          </a:solidFill>
+                          <a:latin typeface="Times New Roman" panose="02020603050405020304" pitchFamily="18" charset="0"/>
+                          <a:cs typeface="Times New Roman" panose="02020603050405020304" pitchFamily="18" charset="0"/>
+                        </a:rPr>
+                        <a:t>36.25</a:t>
+                      </a:r>
                     </a:p>
                   </a:txBody>
                   <a:tcPr anchor="ctr">
@@ -6263,13 +6301,16 @@
                       <a:pPr algn="ctr">
                         <a:buNone/>
                       </a:pPr>
-                      <a:endParaRPr lang="es-ES_tradnl" sz="1200" noProof="1">
-                        <a:solidFill>
-                          <a:schemeClr val="tx1"/>
-                        </a:solidFill>
-                        <a:latin typeface="Times New Roman" panose="02020603050405020304" pitchFamily="18" charset="0"/>
-                        <a:cs typeface="Times New Roman" panose="02020603050405020304" pitchFamily="18" charset="0"/>
-                      </a:endParaRPr>
+                      <a:r>
+                        <a:rPr lang="es-ES_tradnl" sz="1200" noProof="1">
+                          <a:solidFill>
+                            <a:schemeClr val="tx1"/>
+                          </a:solidFill>
+                          <a:latin typeface="Times New Roman" panose="02020603050405020304" pitchFamily="18" charset="0"/>
+                          <a:cs typeface="Times New Roman" panose="02020603050405020304" pitchFamily="18" charset="0"/>
+                        </a:rPr>
+                        <a:t>46.33</a:t>
+                      </a:r>
                     </a:p>
                   </a:txBody>
                   <a:tcPr anchor="ctr">
@@ -6465,13 +6506,16 @@
                       <a:pPr algn="ctr">
                         <a:buNone/>
                       </a:pPr>
-                      <a:endParaRPr lang="es-ES_tradnl" sz="1200" noProof="1">
-                        <a:solidFill>
-                          <a:schemeClr val="tx1"/>
-                        </a:solidFill>
-                        <a:latin typeface="Times New Roman" panose="02020603050405020304" pitchFamily="18" charset="0"/>
-                        <a:cs typeface="Times New Roman" panose="02020603050405020304" pitchFamily="18" charset="0"/>
-                      </a:endParaRPr>
+                      <a:r>
+                        <a:rPr lang="es-ES_tradnl" sz="1200" noProof="1">
+                          <a:solidFill>
+                            <a:schemeClr val="tx1"/>
+                          </a:solidFill>
+                          <a:latin typeface="Times New Roman" panose="02020603050405020304" pitchFamily="18" charset="0"/>
+                          <a:cs typeface="Times New Roman" panose="02020603050405020304" pitchFamily="18" charset="0"/>
+                        </a:rPr>
+                        <a:t>38.64</a:t>
+                      </a:r>
                     </a:p>
                   </a:txBody>
                   <a:tcPr anchor="ctr">
@@ -6586,13 +6630,16 @@
                       <a:pPr algn="ctr">
                         <a:buNone/>
                       </a:pPr>
-                      <a:endParaRPr lang="es-ES_tradnl" sz="1200" noProof="1">
-                        <a:solidFill>
-                          <a:schemeClr val="tx1"/>
-                        </a:solidFill>
-                        <a:latin typeface="Times New Roman" panose="02020603050405020304" pitchFamily="18" charset="0"/>
-                        <a:cs typeface="Times New Roman" panose="02020603050405020304" pitchFamily="18" charset="0"/>
-                      </a:endParaRPr>
+                      <a:r>
+                        <a:rPr lang="es-ES_tradnl" sz="1200" noProof="1">
+                          <a:solidFill>
+                            <a:schemeClr val="tx1"/>
+                          </a:solidFill>
+                          <a:latin typeface="Times New Roman" panose="02020603050405020304" pitchFamily="18" charset="0"/>
+                          <a:cs typeface="Times New Roman" panose="02020603050405020304" pitchFamily="18" charset="0"/>
+                        </a:rPr>
+                        <a:t>46.82</a:t>
+                      </a:r>
                     </a:p>
                   </a:txBody>
                   <a:tcPr anchor="ctr">
@@ -6776,13 +6823,16 @@
                       <a:pPr algn="ctr">
                         <a:buNone/>
                       </a:pPr>
-                      <a:endParaRPr lang="es-ES_tradnl" sz="1200" noProof="1">
-                        <a:solidFill>
-                          <a:schemeClr val="tx1"/>
-                        </a:solidFill>
-                        <a:latin typeface="Times New Roman" panose="02020603050405020304" pitchFamily="18" charset="0"/>
-                        <a:cs typeface="Times New Roman" panose="02020603050405020304" pitchFamily="18" charset="0"/>
-                      </a:endParaRPr>
+                      <a:r>
+                        <a:rPr lang="es-ES_tradnl" sz="1200" noProof="1">
+                          <a:solidFill>
+                            <a:schemeClr val="tx1"/>
+                          </a:solidFill>
+                          <a:latin typeface="Times New Roman" panose="02020603050405020304" pitchFamily="18" charset="0"/>
+                          <a:cs typeface="Times New Roman" panose="02020603050405020304" pitchFamily="18" charset="0"/>
+                        </a:rPr>
+                        <a:t>35.18</a:t>
+                      </a:r>
                     </a:p>
                   </a:txBody>
                   <a:tcPr anchor="ctr">
@@ -6897,13 +6947,16 @@
                       <a:pPr algn="ctr">
                         <a:buNone/>
                       </a:pPr>
-                      <a:endParaRPr lang="es-ES_tradnl" sz="1200" noProof="1">
-                        <a:solidFill>
-                          <a:schemeClr val="tx1"/>
-                        </a:solidFill>
-                        <a:latin typeface="Times New Roman" panose="02020603050405020304" pitchFamily="18" charset="0"/>
-                        <a:cs typeface="Times New Roman" panose="02020603050405020304" pitchFamily="18" charset="0"/>
-                      </a:endParaRPr>
+                      <a:r>
+                        <a:rPr lang="es-ES_tradnl" sz="1200" noProof="1">
+                          <a:solidFill>
+                            <a:schemeClr val="tx1"/>
+                          </a:solidFill>
+                          <a:latin typeface="Times New Roman" panose="02020603050405020304" pitchFamily="18" charset="0"/>
+                          <a:cs typeface="Times New Roman" panose="02020603050405020304" pitchFamily="18" charset="0"/>
+                        </a:rPr>
+                        <a:t>44.79</a:t>
+                      </a:r>
                     </a:p>
                   </a:txBody>
                   <a:tcPr anchor="ctr">
@@ -7097,13 +7150,16 @@
                       <a:pPr algn="ctr">
                         <a:buNone/>
                       </a:pPr>
-                      <a:endParaRPr lang="es-ES_tradnl" sz="1200" noProof="1">
-                        <a:solidFill>
-                          <a:schemeClr val="tx1"/>
-                        </a:solidFill>
-                        <a:latin typeface="Times New Roman" panose="02020603050405020304" pitchFamily="18" charset="0"/>
-                        <a:cs typeface="Times New Roman" panose="02020603050405020304" pitchFamily="18" charset="0"/>
-                      </a:endParaRPr>
+                      <a:r>
+                        <a:rPr lang="es-ES_tradnl" sz="1200" noProof="1">
+                          <a:solidFill>
+                            <a:schemeClr val="tx1"/>
+                          </a:solidFill>
+                          <a:latin typeface="Times New Roman" panose="02020603050405020304" pitchFamily="18" charset="0"/>
+                          <a:cs typeface="Times New Roman" panose="02020603050405020304" pitchFamily="18" charset="0"/>
+                        </a:rPr>
+                        <a:t>36.25</a:t>
+                      </a:r>
                     </a:p>
                   </a:txBody>
                   <a:tcPr anchor="ctr">
@@ -7214,13 +7270,16 @@
                       <a:pPr algn="ctr">
                         <a:buNone/>
                       </a:pPr>
-                      <a:endParaRPr lang="es-ES_tradnl" sz="1200" noProof="1">
-                        <a:solidFill>
-                          <a:schemeClr val="tx1"/>
-                        </a:solidFill>
-                        <a:latin typeface="Times New Roman" panose="02020603050405020304" pitchFamily="18" charset="0"/>
-                        <a:cs typeface="Times New Roman" panose="02020603050405020304" pitchFamily="18" charset="0"/>
-                      </a:endParaRPr>
+                      <a:r>
+                        <a:rPr lang="es-ES_tradnl" sz="1200" noProof="1">
+                          <a:solidFill>
+                            <a:schemeClr val="tx1"/>
+                          </a:solidFill>
+                          <a:latin typeface="Times New Roman" panose="02020603050405020304" pitchFamily="18" charset="0"/>
+                          <a:cs typeface="Times New Roman" panose="02020603050405020304" pitchFamily="18" charset="0"/>
+                        </a:rPr>
+                        <a:t>46.33</a:t>
+                      </a:r>
                     </a:p>
                   </a:txBody>
                   <a:tcPr anchor="ctr">
@@ -7416,13 +7475,16 @@
                       <a:pPr algn="ctr">
                         <a:buNone/>
                       </a:pPr>
-                      <a:endParaRPr lang="es-ES_tradnl" sz="1200" noProof="1">
-                        <a:solidFill>
-                          <a:schemeClr val="tx1"/>
-                        </a:solidFill>
-                        <a:latin typeface="Times New Roman" panose="02020603050405020304" pitchFamily="18" charset="0"/>
-                        <a:cs typeface="Times New Roman" panose="02020603050405020304" pitchFamily="18" charset="0"/>
-                      </a:endParaRPr>
+                      <a:r>
+                        <a:rPr lang="es-ES_tradnl" sz="1200" noProof="1">
+                          <a:solidFill>
+                            <a:schemeClr val="tx1"/>
+                          </a:solidFill>
+                          <a:latin typeface="Times New Roman" panose="02020603050405020304" pitchFamily="18" charset="0"/>
+                          <a:cs typeface="Times New Roman" panose="02020603050405020304" pitchFamily="18" charset="0"/>
+                        </a:rPr>
+                        <a:t>37.41</a:t>
+                      </a:r>
                     </a:p>
                   </a:txBody>
                   <a:tcPr anchor="ctr">
@@ -7537,13 +7599,16 @@
                       <a:pPr algn="ctr">
                         <a:buNone/>
                       </a:pPr>
-                      <a:endParaRPr lang="es-ES_tradnl" sz="1200" noProof="1">
-                        <a:solidFill>
-                          <a:schemeClr val="tx1"/>
-                        </a:solidFill>
-                        <a:latin typeface="Times New Roman" panose="02020603050405020304" pitchFamily="18" charset="0"/>
-                        <a:cs typeface="Times New Roman" panose="02020603050405020304" pitchFamily="18" charset="0"/>
-                      </a:endParaRPr>
+                      <a:r>
+                        <a:rPr lang="es-ES_tradnl" sz="1200" noProof="1">
+                          <a:solidFill>
+                            <a:schemeClr val="tx1"/>
+                          </a:solidFill>
+                          <a:latin typeface="Times New Roman" panose="02020603050405020304" pitchFamily="18" charset="0"/>
+                          <a:cs typeface="Times New Roman" panose="02020603050405020304" pitchFamily="18" charset="0"/>
+                        </a:rPr>
+                        <a:t>47.94</a:t>
+                      </a:r>
                     </a:p>
                   </a:txBody>
                   <a:tcPr anchor="ctr">
